--- a/design/deck/pitch/docket-deck-v7-technical.pptx
+++ b/design/deck/pitch/docket-deck-v7-technical.pptx
@@ -1274,7 +1274,7 @@
           </a:p>
           <a:p>
             <a:r>
-              <a:t>IF ASKED: 62 s is one live application on the cloud desk after the CREAO fix (Oct 24 20:58): pull 1.5 s, hard stops 1.9 s, five lenders 27.7 s, reason tests 1.8 s, notice 25.8 s. Hard stops: median of 3 cloud runs, about 5 s. Most of the minute is the agents on CREAO hosting; called directly, a Claude lender answers in 2.7 s. Under load, 20 applications at once finished in about 2.5 minutes. Human figure: Bankrate, personal loan approval timelines.</a:t>
+              <a:t>IF ASKED: 62 s is one live application on the cloud desk after the CREAO fix (Oct 24 20:58): pull 1.5 s, hard stops 1.9 s, five lenders 27.7 s, reason tests 1.8 s, notice 25.8 s. The pull replayed saved CRS sandbox responses; a live pull takes about 3 s. Hard stops: median of 3 cloud runs, about 5 s. Most of the minute is the agents on CREAO hosting; called directly, a Claude lender answers in 2.7 s. Under load, 20 applications at once finished in about 2.5 minutes. Human figure: Bankrate, personal loan approval timelines.</a:t>
             </a:r>
           </a:p>
         </p:txBody>
@@ -1854,12 +1854,12 @@
           <a:lstStyle/>
           <a:p>
             <a:r>
-              <a:t>0:35 (B) 'That pulled your file from the CRS Credit API sandbox: TransUnion, Equifax, Experian, identity, fraud. Soft pull. Your name, address and SSN never reach a model.'</a:t>
-            </a:r>
-          </a:p>
-          <a:p>
-            <a:r>
-              <a:t>IF ASKED: convex/crs.ts (live sandbox) and convex/pii.ts (allowlist projection, tested). 20 personas captured in convex/fixtures/crs. The sandbox's TransUnion product returns VantageScore 4; the UI says 'TransUnion score'. Fields: credit.fico9, utilization, inquiries6mo, vantage4, flags.frozen, identity.verified, flags.deceased, fraud.score, flags.bankruptcy, flags.eviction, flags.lienOrJudgment.</a:t>
+              <a:t>0:35 (B) 'That is your file from the CRS Credit API sandbox: TransUnion, Equifax, Experian, identity, fraud. Real sandbox responses, replayed for the demo; live pulls are one setting away. Your name, address and SSN never reach a model.'</a:t>
+            </a:r>
+          </a:p>
+          <a:p>
+            <a:r>
+              <a:t>IF ASKED: convex/crs.ts and convex/pii.ts (allowlist projection, tested). The demo replays real CRS sandbox responses, captured live for all 20 personas on Oct 24 (convex/fixtures/crs). CRS_PROVIDER=crs switches to live soft pulls, about 3 s per persona, and the borrower's score doesn't move. The sandbox's TransUnion product returns VantageScore 4; the UI says 'TransUnion score'. Fields: credit.fico9, utilization, inquiries6mo, vantage4, flags.frozen, identity.verified, flags.deceased, fraud.score, flags.bankruptcy, flags.eviction, flags.lienOrJudgment.</a:t>
             </a:r>
           </a:p>
         </p:txBody>
@@ -19838,7 +19838,7 @@
                           </a:solidFill>
                           <a:latin typeface="Arial"/>
                         </a:rPr>
-                        <a:t>One soft pull. No name, address, ZIP or SSN ever reaches a model.</a:t>
+                        <a:t>Real CRS sandbox data, replayed. No name, address, ZIP or SSN ever reaches a model.</a:t>
                       </a:r>
                     </a:p>
                   </a:txBody>
@@ -21215,7 +21215,7 @@
                 </a:solidFill>
                 <a:latin typeface="Arial"/>
               </a:rPr>
-              <a:t>Layer 1: one soft pull from the CRS Credit API gives every lender the same file, and the file an agent sees has no identity in it.</a:t>
+              <a:t>Layer 1: every lender gets the same CRS Credit API sandbox file, and the file an agent sees has no identity in it.</a:t>
             </a:r>
           </a:p>
         </p:txBody>
@@ -22215,7 +22215,7 @@
                 </a:solidFill>
                 <a:latin typeface="Arial"/>
               </a:rPr>
-              <a:t>Same file for every lender, no identity in it, in about 3 seconds, and the borrower's score doesn't move.</a:t>
+              <a:t>Same file for every lender, no identity in it. The demo replays real CRS sandbox pulls; live pulls are one setting away.</a:t>
             </a:r>
           </a:p>
         </p:txBody>

--- a/design/deck/pitch/docket-deck-v7-technical.pptx
+++ b/design/deck/pitch/docket-deck-v7-technical.pptx
@@ -834,7 +834,7 @@
           <a:lstStyle/>
           <a:p>
             <a:r>
-              <a:t>0:00 (A) Docket is a one-person credit union: one loan officer leading a whole lending desk of agents. And every reason in a denial letter is tested.</a:t>
+              <a:t>0:00 (A) Docket is a one-person credit union: one loan officer leveraging a desk of agents. And every reason in a denial letter is tested.</a:t>
             </a:r>
           </a:p>
         </p:txBody>
@@ -5357,7 +5357,7 @@
                 </a:solidFill>
                 <a:latin typeface="Arial"/>
               </a:rPr>
-              <a:t>One loan officer leading a whole lending desk of agents.</a:t>
+              <a:t>One loan officer leveraging a desk of agents.</a:t>
             </a:r>
           </a:p>
         </p:txBody>
@@ -19071,7 +19071,7 @@
                 </a:solidFill>
                 <a:latin typeface="Arial"/>
               </a:rPr>
-              <a:t>Cents to run, dollars to sell, and every new customer is a policy file, not a rebuild.</a:t>
+              <a:t>Cents to run, dollars to sell, and every new customer is just a policy file.</a:t>
             </a:r>
           </a:p>
         </p:txBody>
